--- a/presentations/01-why-a-game/01-why-a-game-lecture.pptx
+++ b/presentations/01-why-a-game/01-why-a-game-lecture.pptx
@@ -138,7 +138,7 @@
   <p:extLst>
     <p:ext uri="{521415D9-36F7-43E2-AB2F-B90AF26B5E84}">
       <p14:sectionLst xmlns:p14="http://schemas.microsoft.com/office/powerpoint/2010/main">
-        <p14:section name="Opening" id="{db2181b2-527a-b155-6522-d8a17474e4e0}">
+        <p14:section name="Opening" id="{b10fb02e-765f-89a0-5aae-1d50019e77fe}">
           <p14:sldIdLst>
             <p14:sldId id="256"/>
             <p14:sldId id="257"/>
@@ -149,7 +149,7 @@
             <p14:sldId id="262"/>
           </p14:sldIdLst>
         </p14:section>
-        <p14:section name="The platform in one paragraph" id="{e43c6b5f-4877-a337-2b69-da2bdfd6f9ea}">
+        <p14:section name="The platform in one paragraph" id="{e1991d4b-47e5-38e0-2313-50507bf9b2fe}">
           <p14:sldIdLst>
             <p14:sldId id="263"/>
             <p14:sldId id="264"/>
@@ -160,7 +160,7 @@
             <p14:sldId id="269"/>
           </p14:sldIdLst>
         </p14:section>
-        <p14:section name="RISC-V as strategic European IP" id="{d15a9840-2821-0af3-0424-ac5cfbc5c0fb}">
+        <p14:section name="RISC-V as strategic European IP" id="{69aab51f-61b6-3e3a-a450-59c77a771b2a}">
           <p14:sldIdLst>
             <p14:sldId id="270"/>
             <p14:sldId id="271"/>
@@ -171,14 +171,14 @@
             <p14:sldId id="276"/>
           </p14:sldIdLst>
         </p14:section>
-        <p14:section name="Why retro games" id="{2b69f90c-e6be-4587-c94e-486447639124}">
+        <p14:section name="Why retro games" id="{fb453228-ed26-90ad-d72d-6ec1c6c465c5}">
           <p14:sldIdLst>
             <p14:sldId id="277"/>
             <p14:sldId id="278"/>
             <p14:sldId id="279"/>
           </p14:sldIdLst>
         </p14:section>
-        <p14:section name="The ecosystem and the book" id="{b26dbc48-51c7-4625-969a-ef54edff963e}">
+        <p14:section name="The ecosystem and the book" id="{054bede6-3977-bee2-c610-f5fee9ee33f1}">
           <p14:sldIdLst>
             <p14:sldId id="280"/>
             <p14:sldId id="281"/>
@@ -189,7 +189,7 @@
             <p14:sldId id="286"/>
           </p14:sldIdLst>
         </p14:section>
-        <p14:section name="Closing" id="{e4daea9c-bebf-c7de-b44f-87e8e035f714}">
+        <p14:section name="Closing" id="{53f4852f-019f-d01d-2429-3667275dcfa1}">
           <p14:sldIdLst>
             <p14:sldId id="287"/>
           </p14:sldIdLst>
